--- a/lecons/LSA/Climatology/LSA_CLIM_L20_Micro_climates.pptx
+++ b/lecons/LSA/Climatology/LSA_CLIM_L20_Micro_climates.pptx
@@ -3022,7 +3022,7 @@
           <a:p>
             <a:r>
               <a:rPr lang="en-US" dirty="0"/>
-              <a:t>Let us copy Meaning and Classification of Micro-climates. Micro-climates can be understood as follows. Write each point on a new line, with the key term first. When you finish, we go to the next slide.</a:t>
+              <a:t>Let us copy Meaning and Classification of Micro-climates. Micro-climates can be understood as follows. On this slide we have Micro-climate. Write each point on a new line, with the key term first, and explain it in your own words when we revise. When you finish, we go to the next slide.</a:t>
             </a:r>
             <a:endParaRPr lang="en-US" dirty="0"/>
           </a:p>
@@ -3110,7 +3110,7 @@
           <a:p>
             <a:r>
               <a:rPr lang="en-US" dirty="0"/>
-              <a:t>We continue with the same part. Write each point on a new line, with the key term first.</a:t>
+              <a:t>We continue with Meaning and Classification of Micro-climates. On this slide we have Meso-climate and Classification. Write each point on a new line, with the key term first, and explain it in your own words when we revise.</a:t>
             </a:r>
             <a:endParaRPr lang="en-US" dirty="0"/>
           </a:p>
@@ -3198,7 +3198,7 @@
           <a:p>
             <a:r>
               <a:rPr lang="en-US" dirty="0"/>
-              <a:t>Let us copy Urban Climates. The characteristics of urban climates are. Write each point on a new line, with the key term first. When you finish, we go to the next slide.</a:t>
+              <a:t>Let us copy Urban Climates. The characteristics of urban climates are. On this slide we have Higher temperatures. Write each point on a new line, with the key term first, and explain it in your own words when we revise. When you finish, we go to the next slide.</a:t>
             </a:r>
             <a:endParaRPr lang="en-US" dirty="0"/>
           </a:p>
@@ -3286,7 +3286,7 @@
           <a:p>
             <a:r>
               <a:rPr lang="en-US" dirty="0"/>
-              <a:t>We continue with the same part. Write each point on a new line, with the key term first. When you finish, we go to the next slide.</a:t>
+              <a:t>We continue with Urban Climates. On this slide we have Humidity and rain. Write each point on a new line, with the key term first, and explain it in your own words when we revise. When you finish, we go to the next slide.</a:t>
             </a:r>
             <a:endParaRPr lang="en-US" dirty="0"/>
           </a:p>
@@ -3374,7 +3374,7 @@
           <a:p>
             <a:r>
               <a:rPr lang="en-US" dirty="0"/>
-              <a:t>We continue with the same part. Write each point on a new line, with the key term first.</a:t>
+              <a:t>We continue with Urban Climates. On this slide we have Winds and pollution. Write each point on a new line, with the key term first, and explain it in your own words when we revise.</a:t>
             </a:r>
             <a:endParaRPr lang="en-US" dirty="0"/>
           </a:p>
@@ -3638,7 +3638,7 @@
           <a:p>
             <a:r>
               <a:rPr lang="en-US" dirty="0"/>
-              <a:t>Let us copy Factors of Urban Climates. Urban climates are caused by the following factors. Write each point on a new line, with the key term first. When you finish, we go to the next slide.</a:t>
+              <a:t>Let us copy Factors of Urban Climates. Urban climates are caused by the following factors. On this slide we have Building materials. Write each point on a new line, with the key term first, and explain it in your own words when we revise. When you finish, we go to the next slide.</a:t>
             </a:r>
             <a:endParaRPr lang="en-US" dirty="0"/>
           </a:p>
@@ -3726,7 +3726,7 @@
           <a:p>
             <a:r>
               <a:rPr lang="en-US" dirty="0"/>
-              <a:t>We continue with the same part. Write each point on a new line, with the key term first. When you finish, we go to the next slide.</a:t>
+              <a:t>We continue with Factors of Urban Climates. On this slide we have Human activities. Write each point on a new line, with the key term first, and explain it in your own words when we revise. When you finish, we go to the next slide.</a:t>
             </a:r>
             <a:endParaRPr lang="en-US" dirty="0"/>
           </a:p>
@@ -3814,7 +3814,7 @@
           <a:p>
             <a:r>
               <a:rPr lang="en-US" dirty="0"/>
-              <a:t>We continue with the same part. Write each point on a new line, with the key term first.</a:t>
+              <a:t>We continue with Factors of Urban Climates. On this slide we have Lack of vegetation and water. Write each point on a new line, with the key term first, and explain it in your own words when we revise.</a:t>
             </a:r>
             <a:endParaRPr lang="en-US" dirty="0"/>
           </a:p>
@@ -3902,7 +3902,7 @@
           <a:p>
             <a:r>
               <a:rPr lang="en-US" dirty="0"/>
-              <a:t>Let us copy Lakeside and Forest Climates. Other micro-climates include. Write each point on a new line, with the key term first. When you finish, we go to the next slide.</a:t>
+              <a:t>Let us copy Lakeside and Forest Climates. Other micro-climates include. On this slide we have Lakeside climate. Write each point on a new line, with the key term first, and explain it in your own words when we revise. When you finish, we go to the next slide.</a:t>
             </a:r>
             <a:endParaRPr lang="en-US" dirty="0"/>
           </a:p>
@@ -3990,7 +3990,7 @@
           <a:p>
             <a:r>
               <a:rPr lang="en-US" dirty="0"/>
-              <a:t>We continue with the same part. Write each point on a new line, with the key term first.</a:t>
+              <a:t>We continue with Lakeside and Forest Climates. On this slide we have Forest climate. Write each point on a new line, with the key term first, and explain it in your own words when we revise.</a:t>
             </a:r>
             <a:endParaRPr lang="en-US" dirty="0"/>
           </a:p>
@@ -5222,7 +5222,7 @@
           <a:p>
             <a:r>
               <a:rPr lang="en-US" dirty="0"/>
-              <a:t>Here is the plan of our lesson today. We shall correction of the homework; then objectives and recall; then real-life situation and action to take; then learning activities; then board summary; then evaluation, remediation and homework.</a:t>
+              <a:t>Here is the plan of our lesson today. First, we shall correct the homework. Then we shall look at the objectives and recall what you already know. After that, we shall study a situation from real life and the action to take, and do the learning activities. Finally, we shall copy the board summary, do the evaluation and the remediation, and I will give you the homework.</a:t>
             </a:r>
             <a:endParaRPr lang="en-US" dirty="0"/>
           </a:p>
@@ -6762,7 +6762,7 @@
                 <a:ea typeface="Times New Roman" pitchFamily="34" charset="-122"/>
                 <a:cs typeface="Times New Roman" pitchFamily="34" charset="-120"/>
               </a:rPr>
-              <a:t>Lesson 20: Micro-climates</a:t>
+              <a:t>Lesson 20</a:t>
             </a:r>
             <a:endParaRPr lang="en-US" sz="2600" dirty="0"/>
           </a:p>
